--- a/Mango-M32F4/12.UART6_RS232/UART6_RS232.pptx
+++ b/Mango-M32F4/12.UART6_RS232/UART6_RS232.pptx
@@ -11559,6 +11559,36 @@
           </a:p>
         </p:txBody>
       </p:sp>
+      <p:pic>
+        <p:nvPicPr>
+          <p:cNvPr id="5" name="그림 4" descr="전자 공학, 전자 부품, 전자제품, 회로 구성요소이(가) 표시된 사진&#10;&#10;AI 생성 콘텐츠는 정확하지 않을 수 있습니다.">
+            <a:extLst>
+              <a:ext uri="{FF2B5EF4-FFF2-40B4-BE49-F238E27FC236}">
+                <a16:creationId xmlns:a16="http://schemas.microsoft.com/office/drawing/2014/main" id="{AC77C497-CA4D-C425-D1A2-B7723D0D7DFC}"/>
+              </a:ext>
+            </a:extLst>
+          </p:cNvPr>
+          <p:cNvPicPr>
+            <a:picLocks noChangeAspect="1"/>
+          </p:cNvPicPr>
+          <p:nvPr/>
+        </p:nvPicPr>
+        <p:blipFill>
+          <a:blip r:embed="rId2"/>
+          <a:stretch>
+            <a:fillRect/>
+          </a:stretch>
+        </p:blipFill>
+        <p:spPr>
+          <a:xfrm>
+            <a:off x="676275" y="2079079"/>
+            <a:ext cx="7839075" cy="4086225"/>
+          </a:xfrm>
+          <a:prstGeom prst="rect">
+            <a:avLst/>
+          </a:prstGeom>
+        </p:spPr>
+      </p:pic>
     </p:spTree>
     <p:extLst>
       <p:ext uri="{BB962C8B-B14F-4D97-AF65-F5344CB8AC3E}">
